--- a/templates/feature/feature_4card_A.pptx
+++ b/templates/feature/feature_4card_A.pptx
@@ -3098,7 +3098,143 @@
       <p:grpSpPr/>
       <p:sp>
         <p:nvSpPr>
-          <p:cNvPr id="2" name="TextBox 1"/>
+          <p:cNvPr id="2" name="Rectangle 1"/>
+          <p:cNvSpPr/>
+          <p:nvPr/>
+        </p:nvSpPr>
+        <p:spPr>
+          <a:xfrm>
+            <a:off x="0" y="0"/>
+            <a:ext cx="7560000" cy="10692000"/>
+          </a:xfrm>
+          <a:prstGeom prst="rect">
+            <a:avLst/>
+          </a:prstGeom>
+          <a:solidFill>
+            <a:srgbClr val="FFFFFF"/>
+          </a:solidFill>
+          <a:ln>
+            <a:noFill/>
+          </a:ln>
+          <a:effectLst/>
+        </p:spPr>
+        <p:style>
+          <a:lnRef idx="1">
+            <a:schemeClr val="accent1"/>
+          </a:lnRef>
+          <a:fillRef idx="3">
+            <a:schemeClr val="accent1"/>
+          </a:fillRef>
+          <a:effectRef idx="2">
+            <a:schemeClr val="accent1"/>
+          </a:effectRef>
+          <a:fontRef idx="minor">
+            <a:schemeClr val="lt1"/>
+          </a:fontRef>
+        </p:style>
+        <p:txBody>
+          <a:bodyPr rtlCol="0" anchor="ctr"/>
+          <a:lstStyle/>
+          <a:p>
+            <a:pPr algn="ctr"/>
+          </a:p>
+        </p:txBody>
+      </p:sp>
+      <p:sp>
+        <p:nvSpPr>
+          <p:cNvPr id="3" name="Rectangle 2"/>
+          <p:cNvSpPr/>
+          <p:nvPr/>
+        </p:nvSpPr>
+        <p:spPr>
+          <a:xfrm>
+            <a:off x="144000" y="0"/>
+            <a:ext cx="9525" cy="10692000"/>
+          </a:xfrm>
+          <a:prstGeom prst="rect">
+            <a:avLst/>
+          </a:prstGeom>
+          <a:solidFill>
+            <a:srgbClr val="D2CEC6">
+              <a:alpha val="9000"/>
+            </a:srgbClr>
+          </a:solidFill>
+          <a:ln>
+            <a:noFill/>
+          </a:ln>
+          <a:effectLst/>
+        </p:spPr>
+        <p:style>
+          <a:lnRef idx="1">
+            <a:schemeClr val="accent1"/>
+          </a:lnRef>
+          <a:fillRef idx="3">
+            <a:schemeClr val="accent1"/>
+          </a:fillRef>
+          <a:effectRef idx="2">
+            <a:schemeClr val="accent1"/>
+          </a:effectRef>
+          <a:fontRef idx="minor">
+            <a:schemeClr val="lt1"/>
+          </a:fontRef>
+        </p:style>
+        <p:txBody>
+          <a:bodyPr rtlCol="0" anchor="ctr"/>
+          <a:lstStyle/>
+          <a:p>
+            <a:pPr algn="ctr"/>
+          </a:p>
+        </p:txBody>
+      </p:sp>
+      <p:sp>
+        <p:nvSpPr>
+          <p:cNvPr id="4" name="Rectangle 3"/>
+          <p:cNvSpPr/>
+          <p:nvPr/>
+        </p:nvSpPr>
+        <p:spPr>
+          <a:xfrm>
+            <a:off x="288000" y="0"/>
+            <a:ext cx="9525" cy="10692000"/>
+          </a:xfrm>
+          <a:prstGeom prst="rect">
+            <a:avLst/>
+          </a:prstGeom>
+          <a:solidFill>
+            <a:srgbClr val="D2CEC6">
+              <a:alpha val="9000"/>
+            </a:srgbClr>
+          </a:solidFill>
+          <a:ln>
+            <a:noFill/>
+          </a:ln>
+          <a:effectLst/>
+        </p:spPr>
+        <p:style>
+          <a:lnRef idx="1">
+            <a:schemeClr val="accent1"/>
+          </a:lnRef>
+          <a:fillRef idx="3">
+            <a:schemeClr val="accent1"/>
+          </a:fillRef>
+          <a:effectRef idx="2">
+            <a:schemeClr val="accent1"/>
+          </a:effectRef>
+          <a:fontRef idx="minor">
+            <a:schemeClr val="lt1"/>
+          </a:fontRef>
+        </p:style>
+        <p:txBody>
+          <a:bodyPr rtlCol="0" anchor="ctr"/>
+          <a:lstStyle/>
+          <a:p>
+            <a:pPr algn="ctr"/>
+          </a:p>
+        </p:txBody>
+      </p:sp>
+      <p:sp>
+        <p:nvSpPr>
+          <p:cNvPr id="5" name="TextBox 4"/>
           <p:cNvSpPr txBox="1"/>
           <p:nvPr/>
         </p:nvSpPr>
@@ -3137,7 +3273,7 @@
       </p:sp>
       <p:sp>
         <p:nvSpPr>
-          <p:cNvPr id="3" name="Rectangle 2"/>
+          <p:cNvPr id="6" name="Rectangle 5"/>
           <p:cNvSpPr/>
           <p:nvPr/>
         </p:nvSpPr>
@@ -3181,7 +3317,7 @@
       </p:sp>
       <p:grpSp>
         <p:nvGrpSpPr>
-          <p:cNvPr id="8" name="GROUP_CARD_1"/>
+          <p:cNvPr id="11" name="GROUP_CARD_1"/>
           <p:cNvGrpSpPr/>
           <p:nvPr/>
         </p:nvGrpSpPr>
@@ -3195,7 +3331,7 @@
         </p:grpSpPr>
         <p:sp>
           <p:nvSpPr>
-            <p:cNvPr id="4" name="PHOTO_1"/>
+            <p:cNvPr id="7" name="PHOTO_1"/>
             <p:cNvSpPr/>
             <p:nvPr/>
           </p:nvSpPr>
@@ -3239,7 +3375,7 @@
         </p:sp>
         <p:sp>
           <p:nvSpPr>
-            <p:cNvPr id="5" name="Rectangle 4"/>
+            <p:cNvPr id="8" name="Rectangle 7"/>
             <p:cNvSpPr/>
             <p:nvPr/>
           </p:nvSpPr>
@@ -3283,7 +3419,7 @@
         </p:sp>
         <p:sp>
           <p:nvSpPr>
-            <p:cNvPr id="6" name="TextBox 5"/>
+            <p:cNvPr id="9" name="TextBox 8"/>
             <p:cNvSpPr txBox="1"/>
             <p:nvPr/>
           </p:nvSpPr>
@@ -3322,7 +3458,7 @@
         </p:sp>
         <p:sp>
           <p:nvSpPr>
-            <p:cNvPr id="7" name="TextBox 6"/>
+            <p:cNvPr id="10" name="TextBox 9"/>
             <p:cNvSpPr txBox="1"/>
             <p:nvPr/>
           </p:nvSpPr>
@@ -3362,7 +3498,7 @@
       </p:grpSp>
       <p:grpSp>
         <p:nvGrpSpPr>
-          <p:cNvPr id="13" name="GROUP_CARD_2"/>
+          <p:cNvPr id="16" name="GROUP_CARD_2"/>
           <p:cNvGrpSpPr/>
           <p:nvPr/>
         </p:nvGrpSpPr>
@@ -3376,7 +3512,7 @@
         </p:grpSpPr>
         <p:sp>
           <p:nvSpPr>
-            <p:cNvPr id="9" name="PHOTO_2"/>
+            <p:cNvPr id="12" name="PHOTO_2"/>
             <p:cNvSpPr/>
             <p:nvPr/>
           </p:nvSpPr>
@@ -3420,7 +3556,7 @@
         </p:sp>
         <p:sp>
           <p:nvSpPr>
-            <p:cNvPr id="10" name="Rectangle 9"/>
+            <p:cNvPr id="13" name="Rectangle 12"/>
             <p:cNvSpPr/>
             <p:nvPr/>
           </p:nvSpPr>
@@ -3464,7 +3600,7 @@
         </p:sp>
         <p:sp>
           <p:nvSpPr>
-            <p:cNvPr id="11" name="TextBox 10"/>
+            <p:cNvPr id="14" name="TextBox 13"/>
             <p:cNvSpPr txBox="1"/>
             <p:nvPr/>
           </p:nvSpPr>
@@ -3503,7 +3639,7 @@
         </p:sp>
         <p:sp>
           <p:nvSpPr>
-            <p:cNvPr id="12" name="TextBox 11"/>
+            <p:cNvPr id="15" name="TextBox 14"/>
             <p:cNvSpPr txBox="1"/>
             <p:nvPr/>
           </p:nvSpPr>
@@ -3543,7 +3679,7 @@
       </p:grpSp>
       <p:grpSp>
         <p:nvGrpSpPr>
-          <p:cNvPr id="18" name="GROUP_CARD_3"/>
+          <p:cNvPr id="21" name="GROUP_CARD_3"/>
           <p:cNvGrpSpPr/>
           <p:nvPr/>
         </p:nvGrpSpPr>
@@ -3557,7 +3693,7 @@
         </p:grpSpPr>
         <p:sp>
           <p:nvSpPr>
-            <p:cNvPr id="14" name="PHOTO_3"/>
+            <p:cNvPr id="17" name="PHOTO_3"/>
             <p:cNvSpPr/>
             <p:nvPr/>
           </p:nvSpPr>
@@ -3601,7 +3737,7 @@
         </p:sp>
         <p:sp>
           <p:nvSpPr>
-            <p:cNvPr id="15" name="Rectangle 14"/>
+            <p:cNvPr id="18" name="Rectangle 17"/>
             <p:cNvSpPr/>
             <p:nvPr/>
           </p:nvSpPr>
@@ -3645,7 +3781,7 @@
         </p:sp>
         <p:sp>
           <p:nvSpPr>
-            <p:cNvPr id="16" name="TextBox 15"/>
+            <p:cNvPr id="19" name="TextBox 18"/>
             <p:cNvSpPr txBox="1"/>
             <p:nvPr/>
           </p:nvSpPr>
@@ -3684,7 +3820,7 @@
         </p:sp>
         <p:sp>
           <p:nvSpPr>
-            <p:cNvPr id="17" name="TextBox 16"/>
+            <p:cNvPr id="20" name="TextBox 19"/>
             <p:cNvSpPr txBox="1"/>
             <p:nvPr/>
           </p:nvSpPr>
@@ -3724,7 +3860,7 @@
       </p:grpSp>
       <p:grpSp>
         <p:nvGrpSpPr>
-          <p:cNvPr id="23" name="GROUP_CARD_4"/>
+          <p:cNvPr id="26" name="GROUP_CARD_4"/>
           <p:cNvGrpSpPr/>
           <p:nvPr/>
         </p:nvGrpSpPr>
@@ -3738,7 +3874,7 @@
         </p:grpSpPr>
         <p:sp>
           <p:nvSpPr>
-            <p:cNvPr id="19" name="PHOTO_4"/>
+            <p:cNvPr id="22" name="PHOTO_4"/>
             <p:cNvSpPr/>
             <p:nvPr/>
           </p:nvSpPr>
@@ -3782,7 +3918,7 @@
         </p:sp>
         <p:sp>
           <p:nvSpPr>
-            <p:cNvPr id="20" name="Rectangle 19"/>
+            <p:cNvPr id="23" name="Rectangle 22"/>
             <p:cNvSpPr/>
             <p:nvPr/>
           </p:nvSpPr>
@@ -3826,7 +3962,7 @@
         </p:sp>
         <p:sp>
           <p:nvSpPr>
-            <p:cNvPr id="21" name="TextBox 20"/>
+            <p:cNvPr id="24" name="TextBox 23"/>
             <p:cNvSpPr txBox="1"/>
             <p:nvPr/>
           </p:nvSpPr>
@@ -3865,7 +4001,7 @@
         </p:sp>
         <p:sp>
           <p:nvSpPr>
-            <p:cNvPr id="22" name="TextBox 21"/>
+            <p:cNvPr id="25" name="TextBox 24"/>
             <p:cNvSpPr txBox="1"/>
             <p:nvPr/>
           </p:nvSpPr>
